--- a/template.pptx
+++ b/template.pptx
@@ -281,7 +281,7 @@
           <a:p>
             <a:fld id="{BCC894AA-2389-4263-AF0F-332A85971B61}" type="datetimeFigureOut">
               <a:rPr lang="en-US" smtClean="0"/>
-              <a:t>4/29/2026</a:t>
+              <a:t>5/6/26</a:t>
             </a:fld>
             <a:endParaRPr lang="en-US"/>
           </a:p>
@@ -347,7 +347,7 @@
           <a:p>
             <a:fld id="{0E08790C-F090-47DB-A715-88DBDE67F52E}" type="slidenum">
               <a:rPr lang="en-US" smtClean="0"/>
-              <a:t>‹Nr.›</a:t>
+              <a:t>‹#›</a:t>
             </a:fld>
             <a:endParaRPr lang="en-US"/>
           </a:p>
@@ -462,7 +462,7 @@
           <a:p>
             <a:fld id="{5E249882-E753-4F55-A9D1-33BB6B44E1C3}" type="datetimeFigureOut">
               <a:rPr lang="en-US" smtClean="0"/>
-              <a:t>4/29/2026</a:t>
+              <a:t>5/6/26</a:t>
             </a:fld>
             <a:endParaRPr lang="en-US"/>
           </a:p>
@@ -620,7 +620,7 @@
           <a:p>
             <a:fld id="{9215E9F1-9D4A-42DA-98DF-21F40EAA3B88}" type="slidenum">
               <a:rPr lang="en-US" smtClean="0"/>
-              <a:t>‹Nr.›</a:t>
+              <a:t>‹#›</a:t>
             </a:fld>
             <a:endParaRPr lang="en-US"/>
           </a:p>
@@ -1168,7 +1168,7 @@
             <a:fld id="{E1D3847D-0559-48C4-894F-E12326BFB226}" type="slidenum">
               <a:rPr lang="en-US" noProof="0" smtClean="0"/>
               <a:pPr/>
-              <a:t>‹Nr.›</a:t>
+              <a:t>‹#›</a:t>
             </a:fld>
             <a:endParaRPr lang="en-US" noProof="0"/>
           </a:p>
@@ -1628,7 +1628,7 @@
             <a:fld id="{E1D3847D-0559-48C4-894F-E12326BFB226}" type="slidenum">
               <a:rPr lang="en-US" noProof="0" smtClean="0"/>
               <a:pPr/>
-              <a:t>‹Nr.›</a:t>
+              <a:t>‹#›</a:t>
             </a:fld>
             <a:endParaRPr lang="en-US" noProof="0"/>
           </a:p>
@@ -1884,7 +1884,7 @@
             <a:fld id="{E1D3847D-0559-48C4-894F-E12326BFB226}" type="slidenum">
               <a:rPr lang="en-US" noProof="0" smtClean="0"/>
               <a:pPr/>
-              <a:t>‹Nr.›</a:t>
+              <a:t>‹#›</a:t>
             </a:fld>
             <a:endParaRPr lang="en-US" noProof="0"/>
           </a:p>
@@ -2141,7 +2141,7 @@
             <a:fld id="{E1D3847D-0559-48C4-894F-E12326BFB226}" type="slidenum">
               <a:rPr lang="en-US" noProof="0" smtClean="0"/>
               <a:pPr/>
-              <a:t>‹Nr.›</a:t>
+              <a:t>‹#›</a:t>
             </a:fld>
             <a:endParaRPr lang="en-US" noProof="0"/>
           </a:p>
@@ -2442,7 +2442,7 @@
             <a:fld id="{E1D3847D-0559-48C4-894F-E12326BFB226}" type="slidenum">
               <a:rPr lang="mk-MK" smtClean="0"/>
               <a:pPr/>
-              <a:t>‹Nr.›</a:t>
+              <a:t>‹#›</a:t>
             </a:fld>
             <a:endParaRPr lang="mk-MK"/>
           </a:p>
@@ -2749,7 +2749,7 @@
             <a:fld id="{E1D3847D-0559-48C4-894F-E12326BFB226}" type="slidenum">
               <a:rPr lang="en-US" smtClean="0"/>
               <a:pPr/>
-              <a:t>‹Nr.›</a:t>
+              <a:t>‹#›</a:t>
             </a:fld>
             <a:endParaRPr lang="en-US"/>
           </a:p>
@@ -2945,7 +2945,7 @@
             <a:fld id="{E1D3847D-0559-48C4-894F-E12326BFB226}" type="slidenum">
               <a:rPr lang="mk-MK" smtClean="0"/>
               <a:pPr/>
-              <a:t>‹Nr.›</a:t>
+              <a:t>‹#›</a:t>
             </a:fld>
             <a:endParaRPr lang="mk-MK"/>
           </a:p>
@@ -3343,7 +3343,7 @@
             <a:fld id="{E1D3847D-0559-48C4-894F-E12326BFB226}" type="slidenum">
               <a:rPr lang="mk-MK" smtClean="0"/>
               <a:pPr/>
-              <a:t>‹Nr.›</a:t>
+              <a:t>‹#›</a:t>
             </a:fld>
             <a:endParaRPr lang="mk-MK"/>
           </a:p>
@@ -3521,7 +3521,7 @@
             <a:fld id="{E1D3847D-0559-48C4-894F-E12326BFB226}" type="slidenum">
               <a:rPr lang="en-US" smtClean="0"/>
               <a:pPr/>
-              <a:t>‹Nr.›</a:t>
+              <a:t>‹#›</a:t>
             </a:fld>
             <a:endParaRPr lang="en-US"/>
           </a:p>
@@ -3774,7 +3774,7 @@
             <a:fld id="{E1D3847D-0559-48C4-894F-E12326BFB226}" type="slidenum">
               <a:rPr lang="en-US" smtClean="0"/>
               <a:pPr/>
-              <a:t>‹Nr.›</a:t>
+              <a:t>‹#›</a:t>
             </a:fld>
             <a:endParaRPr lang="en-US"/>
           </a:p>
@@ -3905,7 +3905,7 @@
             <a:fld id="{E1D3847D-0559-48C4-894F-E12326BFB226}" type="slidenum">
               <a:rPr lang="en-US" noProof="0" smtClean="0"/>
               <a:pPr/>
-              <a:t>‹Nr.›</a:t>
+              <a:t>‹#›</a:t>
             </a:fld>
             <a:endParaRPr lang="en-US" noProof="0"/>
           </a:p>
@@ -4103,7 +4103,7 @@
             <a:fld id="{E1D3847D-0559-48C4-894F-E12326BFB226}" type="slidenum">
               <a:rPr lang="en-US" smtClean="0"/>
               <a:pPr/>
-              <a:t>‹Nr.›</a:t>
+              <a:t>‹#›</a:t>
             </a:fld>
             <a:endParaRPr lang="en-US"/>
           </a:p>
@@ -4454,7 +4454,7 @@
             <a:fld id="{E1D3847D-0559-48C4-894F-E12326BFB226}" type="slidenum">
               <a:rPr lang="en-US" smtClean="0"/>
               <a:pPr/>
-              <a:t>‹Nr.›</a:t>
+              <a:t>‹#›</a:t>
             </a:fld>
             <a:endParaRPr lang="en-US"/>
           </a:p>
@@ -4729,7 +4729,7 @@
             <a:fld id="{E1D3847D-0559-48C4-894F-E12326BFB226}" type="slidenum">
               <a:rPr lang="mk-MK" smtClean="0"/>
               <a:pPr/>
-              <a:t>‹Nr.›</a:t>
+              <a:t>‹#›</a:t>
             </a:fld>
             <a:endParaRPr lang="mk-MK"/>
           </a:p>
@@ -4901,7 +4901,7 @@
             <a:fld id="{E1D3847D-0559-48C4-894F-E12326BFB226}" type="slidenum">
               <a:rPr lang="en-US" smtClean="0"/>
               <a:pPr/>
-              <a:t>‹Nr.›</a:t>
+              <a:t>‹#›</a:t>
             </a:fld>
             <a:endParaRPr lang="en-US"/>
           </a:p>
@@ -5428,7 +5428,7 @@
             <a:fld id="{E1D3847D-0559-48C4-894F-E12326BFB226}" type="slidenum">
               <a:rPr lang="en-US" smtClean="0"/>
               <a:pPr/>
-              <a:t>‹Nr.›</a:t>
+              <a:t>‹#›</a:t>
             </a:fld>
             <a:endParaRPr lang="en-US"/>
           </a:p>
@@ -6018,7 +6018,7 @@
             <a:fld id="{E1D3847D-0559-48C4-894F-E12326BFB226}" type="slidenum">
               <a:rPr lang="en-US" smtClean="0"/>
               <a:pPr/>
-              <a:t>‹Nr.›</a:t>
+              <a:t>‹#›</a:t>
             </a:fld>
             <a:endParaRPr lang="en-US"/>
           </a:p>
@@ -6289,7 +6289,7 @@
             <a:fld id="{E1D3847D-0559-48C4-894F-E12326BFB226}" type="slidenum">
               <a:rPr lang="en-US" smtClean="0"/>
               <a:pPr/>
-              <a:t>‹Nr.›</a:t>
+              <a:t>‹#›</a:t>
             </a:fld>
             <a:endParaRPr lang="en-US"/>
           </a:p>
@@ -6536,7 +6536,7 @@
             <a:fld id="{E1D3847D-0559-48C4-894F-E12326BFB226}" type="slidenum">
               <a:rPr lang="en-US" smtClean="0"/>
               <a:pPr/>
-              <a:t>‹Nr.›</a:t>
+              <a:t>‹#›</a:t>
             </a:fld>
             <a:endParaRPr lang="en-US"/>
           </a:p>
@@ -6829,7 +6829,7 @@
             <a:fld id="{E1D3847D-0559-48C4-894F-E12326BFB226}" type="slidenum">
               <a:rPr lang="en-US" smtClean="0"/>
               <a:pPr/>
-              <a:t>‹Nr.›</a:t>
+              <a:t>‹#›</a:t>
             </a:fld>
             <a:endParaRPr lang="en-US"/>
           </a:p>
@@ -6986,7 +6986,7 @@
             <a:fld id="{E1D3847D-0559-48C4-894F-E12326BFB226}" type="slidenum">
               <a:rPr lang="mk-MK" smtClean="0"/>
               <a:pPr/>
-              <a:t>‹Nr.›</a:t>
+              <a:t>‹#›</a:t>
             </a:fld>
             <a:endParaRPr lang="mk-MK"/>
           </a:p>
@@ -7639,7 +7639,7 @@
             <a:fld id="{E1D3847D-0559-48C4-894F-E12326BFB226}" type="slidenum">
               <a:rPr lang="en-US" smtClean="0"/>
               <a:pPr/>
-              <a:t>‹Nr.›</a:t>
+              <a:t>‹#›</a:t>
             </a:fld>
             <a:endParaRPr lang="en-US"/>
           </a:p>
@@ -7834,7 +7834,7 @@
             <a:fld id="{E1D3847D-0559-48C4-894F-E12326BFB226}" type="slidenum">
               <a:rPr lang="en-US" smtClean="0"/>
               <a:pPr/>
-              <a:t>‹Nr.›</a:t>
+              <a:t>‹#›</a:t>
             </a:fld>
             <a:endParaRPr lang="en-US"/>
           </a:p>
@@ -8519,7 +8519,7 @@
             <a:fld id="{E1D3847D-0559-48C4-894F-E12326BFB226}" type="slidenum">
               <a:rPr lang="en-US" smtClean="0"/>
               <a:pPr/>
-              <a:t>‹Nr.›</a:t>
+              <a:t>‹#›</a:t>
             </a:fld>
             <a:endParaRPr lang="en-US"/>
           </a:p>
@@ -9305,7 +9305,7 @@
             <a:fld id="{E1D3847D-0559-48C4-894F-E12326BFB226}" type="slidenum">
               <a:rPr lang="en-US" smtClean="0"/>
               <a:pPr/>
-              <a:t>‹Nr.›</a:t>
+              <a:t>‹#›</a:t>
             </a:fld>
             <a:endParaRPr lang="en-US"/>
           </a:p>
@@ -10304,7 +10304,7 @@
             <a:fld id="{E1D3847D-0559-48C4-894F-E12326BFB226}" type="slidenum">
               <a:rPr lang="en-US" smtClean="0"/>
               <a:pPr/>
-              <a:t>‹Nr.›</a:t>
+              <a:t>‹#›</a:t>
             </a:fld>
             <a:endParaRPr lang="en-US"/>
           </a:p>
@@ -10470,7 +10470,7 @@
             <a:fld id="{E1D3847D-0559-48C4-894F-E12326BFB226}" type="slidenum">
               <a:rPr lang="en-US" smtClean="0"/>
               <a:pPr/>
-              <a:t>‹Nr.›</a:t>
+              <a:t>‹#›</a:t>
             </a:fld>
             <a:endParaRPr lang="en-US"/>
           </a:p>
@@ -10927,7 +10927,7 @@
             <a:fld id="{E1D3847D-0559-48C4-894F-E12326BFB226}" type="slidenum">
               <a:rPr lang="en-US" smtClean="0"/>
               <a:pPr/>
-              <a:t>‹Nr.›</a:t>
+              <a:t>‹#›</a:t>
             </a:fld>
             <a:endParaRPr lang="en-US"/>
           </a:p>
@@ -11594,7 +11594,7 @@
             <a:fld id="{E1D3847D-0559-48C4-894F-E12326BFB226}" type="slidenum">
               <a:rPr lang="mk-MK" smtClean="0"/>
               <a:pPr/>
-              <a:t>‹Nr.›</a:t>
+              <a:t>‹#›</a:t>
             </a:fld>
             <a:endParaRPr lang="mk-MK"/>
           </a:p>
@@ -12387,7 +12387,7 @@
             <a:fld id="{E1D3847D-0559-48C4-894F-E12326BFB226}" type="slidenum">
               <a:rPr lang="mk-MK" smtClean="0"/>
               <a:pPr/>
-              <a:t>‹Nr.›</a:t>
+              <a:t>‹#›</a:t>
             </a:fld>
             <a:endParaRPr lang="mk-MK"/>
           </a:p>
@@ -13542,7 +13542,7 @@
             <a:fld id="{E1D3847D-0559-48C4-894F-E12326BFB226}" type="slidenum">
               <a:rPr lang="mk-MK" smtClean="0"/>
               <a:pPr/>
-              <a:t>‹Nr.›</a:t>
+              <a:t>‹#›</a:t>
             </a:fld>
             <a:endParaRPr lang="mk-MK"/>
           </a:p>
@@ -14967,7 +14967,7 @@
             <a:fld id="{E1D3847D-0559-48C4-894F-E12326BFB226}" type="slidenum">
               <a:rPr lang="mk-MK" smtClean="0"/>
               <a:pPr/>
-              <a:t>‹Nr.›</a:t>
+              <a:t>‹#›</a:t>
             </a:fld>
             <a:endParaRPr lang="mk-MK"/>
           </a:p>
@@ -15502,7 +15502,7 @@
             <a:fld id="{E1D3847D-0559-48C4-894F-E12326BFB226}" type="slidenum">
               <a:rPr lang="mk-MK" smtClean="0"/>
               <a:pPr/>
-              <a:t>‹Nr.›</a:t>
+              <a:t>‹#›</a:t>
             </a:fld>
             <a:endParaRPr lang="mk-MK"/>
           </a:p>
@@ -16810,7 +16810,7 @@
             <a:fld id="{E1D3847D-0559-48C4-894F-E12326BFB226}" type="slidenum">
               <a:rPr lang="en-US" smtClean="0"/>
               <a:pPr/>
-              <a:t>‹Nr.›</a:t>
+              <a:t>‹#›</a:t>
             </a:fld>
             <a:endParaRPr lang="en-US"/>
           </a:p>
@@ -17509,7 +17509,7 @@
             <a:fld id="{E1D3847D-0559-48C4-894F-E12326BFB226}" type="slidenum">
               <a:rPr lang="en-US" smtClean="0"/>
               <a:pPr/>
-              <a:t>‹Nr.›</a:t>
+              <a:t>‹#›</a:t>
             </a:fld>
             <a:endParaRPr lang="en-US"/>
           </a:p>
@@ -18196,7 +18196,7 @@
             <a:fld id="{E1D3847D-0559-48C4-894F-E12326BFB226}" type="slidenum">
               <a:rPr lang="en-US" smtClean="0"/>
               <a:pPr/>
-              <a:t>‹Nr.›</a:t>
+              <a:t>‹#›</a:t>
             </a:fld>
             <a:endParaRPr lang="en-US"/>
           </a:p>
@@ -18692,7 +18692,7 @@
             <a:fld id="{E1D3847D-0559-48C4-894F-E12326BFB226}" type="slidenum">
               <a:rPr lang="en-US" smtClean="0"/>
               <a:pPr/>
-              <a:t>‹Nr.›</a:t>
+              <a:t>‹#›</a:t>
             </a:fld>
             <a:endParaRPr lang="en-US"/>
           </a:p>
@@ -19027,7 +19027,7 @@
             <a:fld id="{E1D3847D-0559-48C4-894F-E12326BFB226}" type="slidenum">
               <a:rPr lang="en-US" noProof="0" smtClean="0"/>
               <a:pPr/>
-              <a:t>‹Nr.›</a:t>
+              <a:t>‹#›</a:t>
             </a:fld>
             <a:endParaRPr lang="en-US" noProof="0"/>
           </a:p>
@@ -19448,7 +19448,7 @@
             <a:fld id="{E1D3847D-0559-48C4-894F-E12326BFB226}" type="slidenum">
               <a:rPr lang="en-US" noProof="0" smtClean="0"/>
               <a:pPr/>
-              <a:t>‹Nr.›</a:t>
+              <a:t>‹#›</a:t>
             </a:fld>
             <a:endParaRPr lang="en-US" noProof="0"/>
           </a:p>
@@ -19561,7 +19561,7 @@
             <a:fld id="{E1D3847D-0559-48C4-894F-E12326BFB226}" type="slidenum">
               <a:rPr lang="en-US" smtClean="0"/>
               <a:pPr/>
-              <a:t>‹Nr.›</a:t>
+              <a:t>‹#›</a:t>
             </a:fld>
             <a:endParaRPr lang="en-US"/>
           </a:p>
@@ -19804,7 +19804,7 @@
             <a:fld id="{E1D3847D-0559-48C4-894F-E12326BFB226}" type="slidenum">
               <a:rPr lang="en-US" smtClean="0"/>
               <a:pPr/>
-              <a:t>‹Nr.›</a:t>
+              <a:t>‹#›</a:t>
             </a:fld>
             <a:endParaRPr lang="en-US"/>
           </a:p>
@@ -20055,7 +20055,7 @@
             <a:fld id="{E1D3847D-0559-48C4-894F-E12326BFB226}" type="slidenum">
               <a:rPr lang="en-US" noProof="0" smtClean="0"/>
               <a:pPr/>
-              <a:t>‹Nr.›</a:t>
+              <a:t>‹#›</a:t>
             </a:fld>
             <a:endParaRPr lang="en-US" noProof="0"/>
           </a:p>
@@ -20476,7 +20476,7 @@
             <a:fld id="{E1D3847D-0559-48C4-894F-E12326BFB226}" type="slidenum">
               <a:rPr lang="mk-MK" smtClean="0"/>
               <a:pPr/>
-              <a:t>‹Nr.›</a:t>
+              <a:t>‹#›</a:t>
             </a:fld>
             <a:endParaRPr lang="mk-MK"/>
           </a:p>
@@ -21337,8 +21337,8 @@
         </p:nvSpPr>
         <p:spPr>
           <a:xfrm>
-            <a:off x="6636298" y="1284119"/>
-            <a:ext cx="939288" cy="576261"/>
+            <a:off x="7078819" y="1039905"/>
+            <a:ext cx="1135874" cy="825951"/>
           </a:xfrm>
           <a:prstGeom prst="roundRect">
             <a:avLst>
@@ -21379,22 +21379,6 @@
               </a:rPr>
               <a:t>{{score}}</a:t>
             </a:r>
-          </a:p>
-          <a:p>
-            <a:pPr indent="-285750" algn="ctr"/>
-            <a:r>
-              <a:rPr lang="de-DE" sz="600" b="1" spc="-20" dirty="0">
-                <a:solidFill>
-                  <a:schemeClr val="accent1"/>
-                </a:solidFill>
-              </a:rPr>
-              <a:t>Topic score</a:t>
-            </a:r>
-            <a:endParaRPr lang="de-DE" sz="2400" b="1" spc="-20" dirty="0">
-              <a:solidFill>
-                <a:schemeClr val="accent1"/>
-              </a:solidFill>
-            </a:endParaRPr>
           </a:p>
         </p:txBody>
       </p:sp>
@@ -21884,8 +21868,8 @@
         </p:nvSpPr>
         <p:spPr>
           <a:xfrm>
-            <a:off x="3820604" y="424989"/>
-            <a:ext cx="2266543" cy="288000"/>
+            <a:off x="6511997" y="2268792"/>
+            <a:ext cx="2176142" cy="288000"/>
           </a:xfrm>
           <a:prstGeom prst="roundRect">
             <a:avLst>
@@ -22050,87 +22034,6 @@
           </a:fontRef>
         </p:style>
       </p:cxnSp>
-      <p:sp>
-        <p:nvSpPr>
-          <p:cNvPr id="52" name="TextBox 6">
-            <a:extLst>
-              <a:ext uri="{FF2B5EF4-FFF2-40B4-BE49-F238E27FC236}">
-                <a16:creationId xmlns:a16="http://schemas.microsoft.com/office/drawing/2014/main" id="{BFB516B1-910E-97A5-117B-086BA8C08272}"/>
-              </a:ext>
-            </a:extLst>
-          </p:cNvPr>
-          <p:cNvSpPr txBox="1"/>
-          <p:nvPr/>
-        </p:nvSpPr>
-        <p:spPr>
-          <a:xfrm>
-            <a:off x="6527922" y="2117974"/>
-            <a:ext cx="2127178" cy="647897"/>
-          </a:xfrm>
-          <a:prstGeom prst="rect">
-            <a:avLst/>
-          </a:prstGeom>
-          <a:noFill/>
-        </p:spPr>
-        <p:txBody>
-          <a:bodyPr wrap="square" rtlCol="0">
-            <a:noAutofit/>
-          </a:bodyPr>
-          <a:lstStyle/>
-          <a:p>
-            <a:pPr indent="-285750" algn="l"/>
-            <a:r>
-              <a:rPr lang="en-US" sz="1050" dirty="0">
-                <a:solidFill>
-                  <a:schemeClr val="bg1"/>
-                </a:solidFill>
-              </a:rPr>
-              <a:t>Linked to:</a:t>
-            </a:r>
-          </a:p>
-          <a:p>
-            <a:pPr indent="-285750" algn="l"/>
-            <a:endParaRPr lang="mk-MK" sz="600" dirty="0">
-              <a:solidFill>
-                <a:schemeClr val="bg1"/>
-              </a:solidFill>
-            </a:endParaRPr>
-          </a:p>
-          <a:p>
-            <a:pPr marL="179388" indent="-179388">
-              <a:buClr>
-                <a:schemeClr val="accent2"/>
-              </a:buClr>
-              <a:buFont typeface="Wingdings" panose="05000000000000000000" pitchFamily="2" charset="2"/>
-              <a:buChar char="§"/>
-            </a:pPr>
-            <a:r>
-              <a:rPr lang="en-US" sz="1000" dirty="0">
-                <a:solidFill>
-                  <a:schemeClr val="bg1"/>
-                </a:solidFill>
-              </a:rPr>
-              <a:t>{{</a:t>
-            </a:r>
-            <a:r>
-              <a:rPr lang="en-US" sz="1000" dirty="0" err="1">
-                <a:solidFill>
-                  <a:schemeClr val="bg1"/>
-                </a:solidFill>
-              </a:rPr>
-              <a:t>linked_to</a:t>
-            </a:r>
-            <a:r>
-              <a:rPr lang="en-US" sz="1000" dirty="0">
-                <a:solidFill>
-                  <a:schemeClr val="bg1"/>
-                </a:solidFill>
-              </a:rPr>
-              <a:t>}}</a:t>
-            </a:r>
-          </a:p>
-        </p:txBody>
-      </p:sp>
       <p:cxnSp>
         <p:nvCxnSpPr>
           <p:cNvPr id="53" name="Gerader Verbinder 52">
@@ -22190,7 +22093,7 @@
         </p:nvSpPr>
         <p:spPr>
           <a:xfrm>
-            <a:off x="6544363" y="2787521"/>
+            <a:off x="6511997" y="4092876"/>
             <a:ext cx="2127178" cy="680260"/>
           </a:xfrm>
           <a:prstGeom prst="rect">
@@ -22206,18 +22109,13 @@
           <a:p>
             <a:pPr indent="-285750" algn="l"/>
             <a:r>
-              <a:rPr lang="en-US" sz="1050" dirty="0" err="1">
+              <a:rPr lang="en-US" sz="1050" dirty="0">
                 <a:solidFill>
                   <a:schemeClr val="bg1"/>
                 </a:solidFill>
               </a:rPr>
-              <a:t>Zeithorizont</a:t>
-            </a:r>
-            <a:endParaRPr lang="en-US" sz="1050" dirty="0">
-              <a:solidFill>
-                <a:schemeClr val="bg1"/>
-              </a:solidFill>
-            </a:endParaRPr>
+              <a:t>Time horizon</a:t>
+            </a:r>
           </a:p>
           <a:p>
             <a:pPr indent="-285750" algn="l"/>
@@ -22311,7 +22209,7 @@
                   <a:schemeClr val="bg1"/>
                 </a:solidFill>
               </a:rPr>
-              <a:t>management_summary</a:t>
+              <a:t>management_summary:summary</a:t>
             </a:r>
             <a:r>
               <a:rPr lang="en-US" sz="1000" dirty="0">
@@ -22321,6 +22219,137 @@
               </a:rPr>
               <a:t>}}</a:t>
             </a:r>
+          </a:p>
+        </p:txBody>
+      </p:sp>
+      <p:sp>
+        <p:nvSpPr>
+          <p:cNvPr id="5" name="TextBox 6">
+            <a:extLst>
+              <a:ext uri="{FF2B5EF4-FFF2-40B4-BE49-F238E27FC236}">
+                <a16:creationId xmlns:a16="http://schemas.microsoft.com/office/drawing/2014/main" id="{7DE6DC45-5599-C70D-C6C2-FB08C17F6233}"/>
+              </a:ext>
+            </a:extLst>
+          </p:cNvPr>
+          <p:cNvSpPr txBox="1"/>
+          <p:nvPr/>
+        </p:nvSpPr>
+        <p:spPr>
+          <a:xfrm>
+            <a:off x="6538900" y="2835379"/>
+            <a:ext cx="2127178" cy="1185794"/>
+          </a:xfrm>
+          <a:prstGeom prst="rect">
+            <a:avLst/>
+          </a:prstGeom>
+          <a:noFill/>
+        </p:spPr>
+        <p:txBody>
+          <a:bodyPr wrap="square" rtlCol="0">
+            <a:noAutofit/>
+          </a:bodyPr>
+          <a:lstStyle/>
+          <a:p>
+            <a:pPr indent="-285750" algn="l"/>
+            <a:r>
+              <a:rPr lang="en-US" sz="1050" dirty="0" err="1">
+                <a:solidFill>
+                  <a:schemeClr val="bg1"/>
+                </a:solidFill>
+              </a:rPr>
+              <a:t>Reccomendations</a:t>
+            </a:r>
+            <a:endParaRPr lang="en-US" sz="1050" dirty="0">
+              <a:solidFill>
+                <a:schemeClr val="bg1"/>
+              </a:solidFill>
+            </a:endParaRPr>
+          </a:p>
+          <a:p>
+            <a:pPr indent="-285750" algn="l"/>
+            <a:endParaRPr lang="mk-MK" sz="600" dirty="0">
+              <a:solidFill>
+                <a:schemeClr val="bg1"/>
+              </a:solidFill>
+            </a:endParaRPr>
+          </a:p>
+          <a:p>
+            <a:pPr marL="179388" indent="-179388">
+              <a:buClr>
+                <a:schemeClr val="accent2"/>
+              </a:buClr>
+              <a:buFont typeface="Wingdings" panose="05000000000000000000" pitchFamily="2" charset="2"/>
+              <a:buChar char="§"/>
+            </a:pPr>
+            <a:r>
+              <a:rPr lang="en-US" sz="1000" dirty="0">
+                <a:solidFill>
+                  <a:schemeClr val="bg1"/>
+                </a:solidFill>
+              </a:rPr>
+              <a:t>{{</a:t>
+            </a:r>
+            <a:r>
+              <a:rPr lang="en-US" sz="1000" dirty="0" err="1">
+                <a:solidFill>
+                  <a:schemeClr val="bg1"/>
+                </a:solidFill>
+              </a:rPr>
+              <a:t>course_of_action</a:t>
+            </a:r>
+            <a:r>
+              <a:rPr lang="en-US" sz="1000" dirty="0">
+                <a:solidFill>
+                  <a:schemeClr val="bg1"/>
+                </a:solidFill>
+              </a:rPr>
+              <a:t>}}</a:t>
+            </a:r>
+          </a:p>
+        </p:txBody>
+      </p:sp>
+      <p:sp>
+        <p:nvSpPr>
+          <p:cNvPr id="7" name="TextBox 6">
+            <a:extLst>
+              <a:ext uri="{FF2B5EF4-FFF2-40B4-BE49-F238E27FC236}">
+                <a16:creationId xmlns:a16="http://schemas.microsoft.com/office/drawing/2014/main" id="{886D50FE-7760-370F-DB38-7022C33F0F10}"/>
+              </a:ext>
+            </a:extLst>
+          </p:cNvPr>
+          <p:cNvSpPr txBox="1"/>
+          <p:nvPr/>
+        </p:nvSpPr>
+        <p:spPr>
+          <a:xfrm rot="16200000">
+            <a:off x="6104071" y="1465077"/>
+            <a:ext cx="1098311" cy="215444"/>
+          </a:xfrm>
+          <a:prstGeom prst="rect">
+            <a:avLst/>
+          </a:prstGeom>
+          <a:noFill/>
+        </p:spPr>
+        <p:txBody>
+          <a:bodyPr wrap="square">
+            <a:spAutoFit/>
+          </a:bodyPr>
+          <a:lstStyle/>
+          <a:p>
+            <a:pPr indent="-285750" algn="ctr"/>
+            <a:r>
+              <a:rPr lang="de-DE" sz="800" b="1" spc="-20" dirty="0">
+                <a:solidFill>
+                  <a:schemeClr val="accent2"/>
+                </a:solidFill>
+              </a:rPr>
+              <a:t>Topic score</a:t>
+            </a:r>
+            <a:endParaRPr lang="de-DE" sz="4800" b="1" spc="-20" dirty="0">
+              <a:solidFill>
+                <a:schemeClr val="accent2"/>
+              </a:solidFill>
+            </a:endParaRPr>
           </a:p>
         </p:txBody>
       </p:sp>
@@ -23117,18 +23146,18 @@
 </file>
 
 <file path=customXml/item1.xml><?xml version="1.0" encoding="utf-8"?>
-<p:properties xmlns:p="http://schemas.microsoft.com/office/2006/metadata/properties" xmlns:xsi="http://www.w3.org/2001/XMLSchema-instance" xmlns:pc="http://schemas.microsoft.com/office/infopath/2007/PartnerControls">
-  <documentManagement/>
-</p:properties>
-</file>
-
-<file path=customXml/item2.xml><?xml version="1.0" encoding="utf-8"?>
 <?mso-contentType ?>
 <FormTemplates xmlns="http://schemas.microsoft.com/sharepoint/v3/contenttype/forms">
   <Display>DocumentLibraryForm</Display>
   <Edit>DocumentLibraryForm</Edit>
   <New>DocumentLibraryForm</New>
 </FormTemplates>
+</file>
+
+<file path=customXml/item2.xml><?xml version="1.0" encoding="utf-8"?>
+<p:properties xmlns:p="http://schemas.microsoft.com/office/2006/metadata/properties" xmlns:xsi="http://www.w3.org/2001/XMLSchema-instance" xmlns:pc="http://schemas.microsoft.com/office/infopath/2007/PartnerControls">
+  <documentManagement/>
+</p:properties>
 </file>
 
 <file path=customXml/item3.xml><?xml version="1.0" encoding="utf-8"?>
@@ -23294,6 +23323,14 @@
 </file>
 
 <file path=customXml/itemProps1.xml><?xml version="1.0" encoding="utf-8"?>
+<ds:datastoreItem xmlns:ds="http://schemas.openxmlformats.org/officeDocument/2006/customXml" ds:itemID="{8433729E-FFD6-4DC7-8C71-E5775EFF9CE1}">
+  <ds:schemaRefs>
+    <ds:schemaRef ds:uri="http://schemas.microsoft.com/sharepoint/v3/contenttype/forms"/>
+  </ds:schemaRefs>
+</ds:datastoreItem>
+</file>
+
+<file path=customXml/itemProps2.xml><?xml version="1.0" encoding="utf-8"?>
 <ds:datastoreItem xmlns:ds="http://schemas.openxmlformats.org/officeDocument/2006/customXml" ds:itemID="{5DB35544-B803-40B6-9430-4B3FAAF1F20F}">
   <ds:schemaRefs>
     <ds:schemaRef ds:uri="http://purl.org/dc/dcmitype/"/>
@@ -23306,14 +23343,6 @@
     <ds:schemaRef ds:uri="http://schemas.microsoft.com/office/infopath/2007/PartnerControls"/>
     <ds:schemaRef ds:uri="676d158c-b7ea-4b8c-ac13-0054087b3e8b"/>
     <ds:schemaRef ds:uri="cf594bf8-f39a-47bd-8523-36180a76e3a3"/>
-  </ds:schemaRefs>
-</ds:datastoreItem>
-</file>
-
-<file path=customXml/itemProps2.xml><?xml version="1.0" encoding="utf-8"?>
-<ds:datastoreItem xmlns:ds="http://schemas.openxmlformats.org/officeDocument/2006/customXml" ds:itemID="{8433729E-FFD6-4DC7-8C71-E5775EFF9CE1}">
-  <ds:schemaRefs>
-    <ds:schemaRef ds:uri="http://schemas.microsoft.com/sharepoint/v3/contenttype/forms"/>
   </ds:schemaRefs>
 </ds:datastoreItem>
 </file>
